--- a/evidence/2026-10-02/run-fair/raw/libreoffice/template-mutation/measured-1.pptx
+++ b/evidence/2026-10-02/run-fair/raw/libreoffice/template-mutation/measured-1.pptx
@@ -424,7 +424,7 @@
             <a:pPr indent="0" algn="r">
               <a:buNone/>
             </a:pPr>
-            <a:fld id="{766E2981-3FAE-49F8-A9BD-BACADC9CBBF2}" type="slidenum">
+            <a:fld id="{75B7040F-0942-4ABD-99A3-45B8F6887A03}" type="slidenum">
               <a:rPr lang="en-US" sz="1400" b="0" u="none" strike="noStrike">
                 <a:solidFill>
                   <a:srgbClr val="000000"/>
@@ -598,7 +598,7 @@
               </a:lnSpc>
               <a:buNone/>
             </a:pPr>
-            <a:fld id="{6C58E23B-9F6B-4E6B-9F25-F20E303B6616}" type="slidenum">
+            <a:fld id="{CE12957F-1737-4E0F-8432-CB00DC7FA4FA}" type="slidenum">
               <a:rPr lang="en-US" sz="1200" b="0" u="none" strike="noStrike">
                 <a:solidFill>
                   <a:srgbClr val="000000"/>
@@ -915,7 +915,7 @@
               </a:lnSpc>
               <a:buNone/>
             </a:pPr>
-            <a:fld id="{133F1BC7-D9E9-495D-97D1-FBB2E3826ABE}" type="slidenum">
+            <a:fld id="{EF9EC525-2D79-4719-A481-4D9242364FF6}" type="slidenum">
               <a:rPr lang="en-US" sz="1200" b="0" u="none" strike="noStrike">
                 <a:solidFill>
                   <a:schemeClr val="dk1">
@@ -1627,7 +1627,7 @@
               </a:lnSpc>
               <a:buNone/>
             </a:pPr>
-            <a:fld id="{C29B608D-A6D9-4069-9AA7-14BC488409E2}" type="slidenum">
+            <a:fld id="{2602FAB8-4551-4543-8634-C764A5F7248F}" type="slidenum">
               <a:rPr lang="en-US" sz="1200" b="0" u="none" strike="noStrike">
                 <a:solidFill>
                   <a:schemeClr val="dk1">
@@ -2086,7 +2086,7 @@
               </a:lnSpc>
               <a:buNone/>
             </a:pPr>
-            <a:fld id="{9CDCD7C6-2AA4-4637-8AC0-AC99972BDAC1}" type="slidenum">
+            <a:fld id="{7210B2A2-A0B6-490F-9F57-7609A686478A}" type="slidenum">
               <a:rPr lang="en-US" sz="1200" b="0" u="none" strike="noStrike">
                 <a:solidFill>
                   <a:schemeClr val="dk1">
@@ -2714,7 +2714,7 @@
               </a:lnSpc>
               <a:buNone/>
             </a:pPr>
-            <a:fld id="{19ED2E82-257B-4FE8-A9E6-EFC1AC870401}" type="slidenum">
+            <a:fld id="{40E3D8F8-0ACB-440C-8620-DCD7597C272A}" type="slidenum">
               <a:rPr lang="en-US" sz="1200" b="0" u="none" strike="noStrike">
                 <a:solidFill>
                   <a:schemeClr val="dk1">
@@ -3342,7 +3342,7 @@
               </a:lnSpc>
               <a:buNone/>
             </a:pPr>
-            <a:fld id="{23758AB5-D64A-44D7-820A-F27DBA95244B}" type="slidenum">
+            <a:fld id="{E4537DA1-669C-4C9D-BBF3-7C2D480C30ED}" type="slidenum">
               <a:rPr lang="en-US" sz="1200" b="0" u="none" strike="noStrike">
                 <a:solidFill>
                   <a:schemeClr val="dk1">
@@ -3970,7 +3970,7 @@
               </a:lnSpc>
               <a:buNone/>
             </a:pPr>
-            <a:fld id="{2FE9C3EA-1024-4F10-8248-5D06847D0287}" type="slidenum">
+            <a:fld id="{93B0C0B0-D4F3-4B74-8E25-5A9C70425C57}" type="slidenum">
               <a:rPr lang="en-US" sz="1200" b="0" u="none" strike="noStrike">
                 <a:solidFill>
                   <a:schemeClr val="dk1">
@@ -4382,7 +4382,7 @@
               </a:lnSpc>
               <a:buNone/>
             </a:pPr>
-            <a:fld id="{041CF612-2B5D-4B64-9650-9B4C99C64CCB}" type="slidenum">
+            <a:fld id="{B750CB6C-1FC9-4CAB-A6B0-AD79B74725A2}" type="slidenum">
               <a:rPr lang="en-US" sz="1200" b="0" u="none" strike="noStrike">
                 <a:solidFill>
                   <a:schemeClr val="dk1">
@@ -5316,7 +5316,7 @@
               </a:lnSpc>
               <a:buNone/>
             </a:pPr>
-            <a:fld id="{2CD44454-4624-489D-AA43-74D90767112D}" type="slidenum">
+            <a:fld id="{A7CF211B-1F03-4E5C-9D28-28F50DF6D912}" type="slidenum">
               <a:rPr lang="en-US" sz="1200" b="0" u="none" strike="noStrike">
                 <a:solidFill>
                   <a:schemeClr val="dk1">
@@ -6478,7 +6478,7 @@
               </a:lnSpc>
               <a:buNone/>
             </a:pPr>
-            <a:fld id="{05B2DD1E-D590-45FA-AE4F-5F6D6C6BC26B}" type="slidenum">
+            <a:fld id="{5C440372-1B07-41C3-B8C9-22C82CBB26E3}" type="slidenum">
               <a:rPr lang="en-US" sz="1200" b="0" u="none" strike="noStrike">
                 <a:solidFill>
                   <a:schemeClr val="dk1">
@@ -6800,7 +6800,7 @@
               </a:lnSpc>
               <a:buNone/>
             </a:pPr>
-            <a:fld id="{B967FE71-AAB0-4A60-954D-534CFAE6FB49}" type="slidenum">
+            <a:fld id="{176B6E75-7387-41AD-8ED6-DE040F0804FD}" type="slidenum">
               <a:rPr lang="en-US" sz="1200" b="0" u="none" strike="noStrike">
                 <a:solidFill>
                   <a:schemeClr val="dk1">
@@ -7050,7 +7050,7 @@
               </a:lnSpc>
               <a:buNone/>
             </a:pPr>
-            <a:fld id="{26474236-861C-4B2A-BB5E-D7C07F4FE5FF}" type="slidenum">
+            <a:fld id="{1ECC16D2-F605-4F38-8308-BDCD733EAD16}" type="slidenum">
               <a:rPr lang="en-US" sz="1200" b="0" u="none" strike="noStrike">
                 <a:solidFill>
                   <a:schemeClr val="dk1">
